--- a/curso_es/pptx/S56.pptx
+++ b/curso_es/pptx/S56.pptx
@@ -3980,7 +3980,7 @@
                 </a:solidFill>
                 <a:latin typeface="Fredoka"/>
               </a:rPr>
-              <a:t>Caso 1 · Los libros de Omar</a:t>
+              <a:t>Caso 1 · Los libros de un chico</a:t>
             </a:r>
           </a:p>
         </p:txBody>
@@ -4062,7 +4062,7 @@
                 </a:solidFill>
                 <a:latin typeface="Nunito Sans"/>
               </a:rPr>
-              <a:t>La IA le da a Omar tres libros sobre la historia del Athletic, con título, autor y año.</a:t>
+              <a:t>La IA le da a un chico tres libros sobre la historia del Athletic, con título, autor y año.</a:t>
             </a:r>
           </a:p>
         </p:txBody>
@@ -4289,7 +4289,7 @@
                 </a:solidFill>
                 <a:latin typeface="Fredoka"/>
               </a:rPr>
-              <a:t>Caso 2 · La fotosíntesis de Naiara</a:t>
+              <a:t>Caso 2 · La fotosíntesis de una chica</a:t>
             </a:r>
           </a:p>
         </p:txBody>
@@ -4371,7 +4371,7 @@
                 </a:solidFill>
                 <a:latin typeface="Nunito Sans"/>
               </a:rPr>
-              <a:t>Naiara no entiende la fotosíntesis. Pide a la IA que se la explique con palabras sencillas y luego lo compara con su libro de Biología.</a:t>
+              <a:t>Una chica no entiende la fotosíntesis. Pide a la IA que se la explique con palabras sencillas y luego lo compara con su libro de Biología.</a:t>
             </a:r>
           </a:p>
         </p:txBody>
@@ -4680,7 +4680,7 @@
                 </a:solidFill>
                 <a:latin typeface="Nunito Sans"/>
               </a:rPr>
-              <a:t>Una IA le dice a Chen que el museo Guggenheim de Bilbao se inauguró en 1997. Su amigo: «Eso es de una IA, seguro que es falso».</a:t>
+              <a:t>Una IA le dice a un chico que el museo Guggenheim de Bilbao se inauguró en 1997. Su amigo: «Eso es de una IA, seguro que es falso».</a:t>
             </a:r>
           </a:p>
         </p:txBody>
@@ -4778,7 +4778,7 @@
                 </a:solidFill>
                 <a:latin typeface="Nunito Sans"/>
               </a:rPr>
-              <a:t>Chen lo busca en la web del museo: se inauguró en 1997. Es verdad.</a:t>
+              <a:t>Ese chico lo busca en la web del museo: se inauguró en 1997. Es verdad.</a:t>
             </a:r>
           </a:p>
           <a:p>
@@ -6388,7 +6388,7 @@
                 </a:solidFill>
                 <a:latin typeface="Nunito Sans"/>
               </a:rPr>
-              <a:t>Omar pide a una IA tres libros sobre la historia del Athletic para un trabajo. La IA le da títulos, autores y años. Dos libros no existen.</a:t>
+              <a:t>Un chico pide a una IA tres libros sobre la historia del Athletic para un trabajo. La IA le da títulos, autores y años. Dos libros no existen.</a:t>
             </a:r>
           </a:p>
         </p:txBody>
@@ -6427,7 +6427,7 @@
                 </a:solidFill>
                 <a:latin typeface="Nunito Sans"/>
               </a:rPr>
-              <a:t>¿Cómo podría haberlo descubierto Omar antes de entregar el trabajo?</a:t>
+              <a:t>¿Cómo podría haberlo descubierto ese chico antes de entregar el trabajo?</a:t>
             </a:r>
           </a:p>
         </p:txBody>
